--- a/docs/en/sales/nursery-pitch-deck.pptx
+++ b/docs/en/sales/nursery-pitch-deck.pptx
@@ -4287,7 +4287,7 @@
                 <a:ea typeface="Calibri" pitchFamily="34" charset="-122"/>
                 <a:cs typeface="Calibri" pitchFamily="34" charset="-120"/>
               </a:rPr>
-              <a:t>One tool, many occasions</a:t>
+              <a:t>Monthly, not one-time</a:t>
             </a:r>
             <a:endParaRPr lang="en-US" sz="1400" dirty="0"/>
           </a:p>
@@ -4329,7 +4329,7 @@
                 <a:ea typeface="Calibri" pitchFamily="34" charset="-122"/>
                 <a:cs typeface="Calibri" pitchFamily="34" charset="-120"/>
               </a:rPr>
-              <a:t>Classroom lessons, graduations, National Day, and parent takeaway gifts.</a:t>
+              <a:t>A new story every month, not just once at graduation.</a:t>
             </a:r>
             <a:endParaRPr lang="en-US" sz="1150" dirty="0"/>
           </a:p>

--- a/docs/en/sales/nursery-pitch-deck.pptx
+++ b/docs/en/sales/nursery-pitch-deck.pptx
@@ -1555,7 +1555,7 @@
                 <a:ea typeface="Cambria" pitchFamily="34" charset="-122"/>
                 <a:cs typeface="Cambria" pitchFamily="34" charset="-120"/>
               </a:rPr>
-              <a:t>Khayali</a:t>
+              <a:t>TooniX</a:t>
             </a:r>
             <a:endParaRPr lang="en-US" sz="4400" dirty="0"/>
           </a:p>
@@ -2334,7 +2334,7 @@
                 <a:ea typeface="Calibri" pitchFamily="34" charset="-122"/>
                 <a:cs typeface="Calibri" pitchFamily="34" charset="-120"/>
               </a:rPr>
-              <a:t>Khayali — Nursery Pilot Program</a:t>
+              <a:t>TooniX — Nursery Pilot Program</a:t>
             </a:r>
             <a:endParaRPr lang="en-US" sz="1000" dirty="0"/>
           </a:p>
@@ -2987,7 +2987,7 @@
                 <a:ea typeface="Calibri" pitchFamily="34" charset="-122"/>
                 <a:cs typeface="Calibri" pitchFamily="34" charset="-120"/>
               </a:rPr>
-              <a:t>Khayali — Nursery Pilot Program</a:t>
+              <a:t>TooniX — Nursery Pilot Program</a:t>
             </a:r>
             <a:endParaRPr lang="en-US" sz="1000" dirty="0"/>
           </a:p>
@@ -3760,7 +3760,7 @@
                 <a:ea typeface="Calibri" pitchFamily="34" charset="-122"/>
                 <a:cs typeface="Calibri" pitchFamily="34" charset="-120"/>
               </a:rPr>
-              <a:t>Khayali — Nursery Pilot Program</a:t>
+              <a:t>TooniX — Nursery Pilot Program</a:t>
             </a:r>
             <a:endParaRPr lang="en-US" sz="1000" dirty="0"/>
           </a:p>
@@ -3870,7 +3870,7 @@
                 <a:ea typeface="Calibri" pitchFamily="34" charset="-122"/>
                 <a:cs typeface="Calibri" pitchFamily="34" charset="-120"/>
               </a:rPr>
-              <a:t>WHY NURSERIES CHOOSE KHAYALI</a:t>
+              <a:t>WHY NURSERIES CHOOSE TOONIX</a:t>
             </a:r>
             <a:endParaRPr lang="en-US" sz="1200" dirty="0"/>
           </a:p>
@@ -4368,7 +4368,7 @@
                 <a:ea typeface="Calibri" pitchFamily="34" charset="-122"/>
                 <a:cs typeface="Calibri" pitchFamily="34" charset="-120"/>
               </a:rPr>
-              <a:t>Khayali — Nursery Pilot Program</a:t>
+              <a:t>TooniX — Nursery Pilot Program</a:t>
             </a:r>
             <a:endParaRPr lang="en-US" sz="1000" dirty="0"/>
           </a:p>
@@ -5299,7 +5299,7 @@
                 <a:ea typeface="Calibri" pitchFamily="34" charset="-122"/>
                 <a:cs typeface="Calibri" pitchFamily="34" charset="-120"/>
               </a:rPr>
-              <a:t>Khayali — Nursery Pilot Program</a:t>
+              <a:t>TooniX — Nursery Pilot Program</a:t>
             </a:r>
             <a:endParaRPr lang="en-US" sz="1000" dirty="0"/>
           </a:p>
@@ -5923,7 +5923,7 @@
                 <a:ea typeface="Calibri" pitchFamily="34" charset="-122"/>
                 <a:cs typeface="Calibri" pitchFamily="34" charset="-120"/>
               </a:rPr>
-              <a:t>Khayali — Nursery Pilot Program</a:t>
+              <a:t>TooniX — Nursery Pilot Program</a:t>
             </a:r>
             <a:endParaRPr lang="en-US" sz="1000" dirty="0"/>
           </a:p>

--- a/docs/en/sales/nursery-pitch-deck.pptx
+++ b/docs/en/sales/nursery-pitch-deck.pptx
@@ -1555,7 +1555,7 @@
                 <a:ea typeface="Cambria" pitchFamily="34" charset="-122"/>
                 <a:cs typeface="Cambria" pitchFamily="34" charset="-120"/>
               </a:rPr>
-              <a:t>TooniX</a:t>
+              <a:t>Ownly</a:t>
             </a:r>
             <a:endParaRPr lang="en-US" sz="4400" dirty="0"/>
           </a:p>
@@ -2334,7 +2334,7 @@
                 <a:ea typeface="Calibri" pitchFamily="34" charset="-122"/>
                 <a:cs typeface="Calibri" pitchFamily="34" charset="-120"/>
               </a:rPr>
-              <a:t>TooniX — Nursery Pilot Program</a:t>
+              <a:t>Ownly — Nursery Pilot Program</a:t>
             </a:r>
             <a:endParaRPr lang="en-US" sz="1000" dirty="0"/>
           </a:p>
@@ -2987,7 +2987,7 @@
                 <a:ea typeface="Calibri" pitchFamily="34" charset="-122"/>
                 <a:cs typeface="Calibri" pitchFamily="34" charset="-120"/>
               </a:rPr>
-              <a:t>TooniX — Nursery Pilot Program</a:t>
+              <a:t>Ownly — Nursery Pilot Program</a:t>
             </a:r>
             <a:endParaRPr lang="en-US" sz="1000" dirty="0"/>
           </a:p>
@@ -3760,7 +3760,7 @@
                 <a:ea typeface="Calibri" pitchFamily="34" charset="-122"/>
                 <a:cs typeface="Calibri" pitchFamily="34" charset="-120"/>
               </a:rPr>
-              <a:t>TooniX — Nursery Pilot Program</a:t>
+              <a:t>Ownly — Nursery Pilot Program</a:t>
             </a:r>
             <a:endParaRPr lang="en-US" sz="1000" dirty="0"/>
           </a:p>
@@ -3870,7 +3870,7 @@
                 <a:ea typeface="Calibri" pitchFamily="34" charset="-122"/>
                 <a:cs typeface="Calibri" pitchFamily="34" charset="-120"/>
               </a:rPr>
-              <a:t>WHY NURSERIES CHOOSE TOONIX</a:t>
+              <a:t>WHY NURSERIES CHOOSE OWNLY</a:t>
             </a:r>
             <a:endParaRPr lang="en-US" sz="1200" dirty="0"/>
           </a:p>
@@ -4368,7 +4368,7 @@
                 <a:ea typeface="Calibri" pitchFamily="34" charset="-122"/>
                 <a:cs typeface="Calibri" pitchFamily="34" charset="-120"/>
               </a:rPr>
-              <a:t>TooniX — Nursery Pilot Program</a:t>
+              <a:t>Ownly — Nursery Pilot Program</a:t>
             </a:r>
             <a:endParaRPr lang="en-US" sz="1000" dirty="0"/>
           </a:p>
@@ -5299,7 +5299,7 @@
                 <a:ea typeface="Calibri" pitchFamily="34" charset="-122"/>
                 <a:cs typeface="Calibri" pitchFamily="34" charset="-120"/>
               </a:rPr>
-              <a:t>TooniX — Nursery Pilot Program</a:t>
+              <a:t>Ownly — Nursery Pilot Program</a:t>
             </a:r>
             <a:endParaRPr lang="en-US" sz="1000" dirty="0"/>
           </a:p>
@@ -5923,7 +5923,7 @@
                 <a:ea typeface="Calibri" pitchFamily="34" charset="-122"/>
                 <a:cs typeface="Calibri" pitchFamily="34" charset="-120"/>
               </a:rPr>
-              <a:t>TooniX — Nursery Pilot Program</a:t>
+              <a:t>Ownly — Nursery Pilot Program</a:t>
             </a:r>
             <a:endParaRPr lang="en-US" sz="1000" dirty="0"/>
           </a:p>
